--- a/content/W00/D3/slides/C2_W00_D03_half2_STUDENT.pptx
+++ b/content/W00/D3/slides/C2_W00_D03_half2_STUDENT.pptx
@@ -3481,14 +3481,14 @@
       </p:sp>
       <p:pic>
         <p:nvPicPr>
-          <p:cNvPr id="6" name="Picture 5" descr="9f1bbe3d62150cab.png"/>
+          <p:cNvPr id="6" name="Picture 5" descr="c64bf13088fde20b.png"/>
           <p:cNvPicPr>
             <a:picLocks noChangeAspect="1"/>
           </p:cNvPicPr>
           <p:nvPr/>
         </p:nvPicPr>
         <p:blipFill>
-          <a:blip r:embed="rId2"/>
+          <a:blip r:embed="rId3"/>
           <a:stretch>
             <a:fillRect/>
           </a:stretch>
